--- a/Zetwork Smart Board Presentation.pptx
+++ b/Zetwork Smart Board Presentation.pptx
@@ -3351,7 +3351,7 @@
                 </a:solidFill>
                 <a:latin typeface="Consolas"/>
               </a:rPr>
-              <a:t>POWERING TECH TEAM MATCHING</a:t>
+              <a:t>BUILD WITH THE RIGHT PEOPLE</a:t>
             </a:r>
           </a:p>
         </p:txBody>
@@ -5991,7 +5991,7 @@
                 </a:solidFill>
                 <a:latin typeface="Consolas"/>
               </a:rPr>
-              <a:t>ZETWORK  ·  POWERING TECH TEAM MATCHING</a:t>
+              <a:t>ZETWORK  ·  BUILD WITH THE RIGHT PEOPLE</a:t>
             </a:r>
           </a:p>
         </p:txBody>
